--- a/presentaciones/SIO0010-S4-Llave-publica-y-firma.pptx
+++ b/presentaciones/SIO0010-S4-Llave-publica-y-firma.pptx
@@ -49688,7 +49688,7 @@
         <p:spPr>
           <a:xfrm>
             <a:off x="566928" y="4445081"/>
-            <a:ext cx="3594140" cy="484997"/>
+            <a:ext cx="3594140" cy="668060"/>
           </a:xfrm>
           <a:prstGeom prst="rect">
             <a:avLst/>
@@ -49730,7 +49730,7 @@
         <p:spPr>
           <a:xfrm>
             <a:off x="4325660" y="4445081"/>
-            <a:ext cx="7131771" cy="484997"/>
+            <a:ext cx="7131771" cy="668060"/>
           </a:xfrm>
           <a:prstGeom prst="rect">
             <a:avLst/>
@@ -49758,7 +49758,7 @@
                 </a:solidFill>
                 <a:latin typeface="Arial"/>
               </a:rPr>
-              <a:t>Quién custodia, con qué doble control y con qué registro de ceremonia. Es el punto de partida de la política que se cierra en la sesión 6</a:t>
+              <a:t>El anexo técnico las identifica como 3DES cargadas a mano en 2019, sin rotación. Definan quién custodia, con qué doble control y con qué registro de ceremonia. Es el punto de partida de la política que se cierra en la sesión 6</a:t>
             </a:r>
           </a:p>
         </p:txBody>
@@ -49771,7 +49771,7 @@
         </p:nvSpPr>
         <p:spPr>
           <a:xfrm>
-            <a:off x="566928" y="4893503"/>
+            <a:off x="566928" y="5076565"/>
             <a:ext cx="11055096" cy="7315"/>
           </a:xfrm>
           <a:prstGeom prst="rect">
@@ -49815,7 +49815,7 @@
         </p:nvSpPr>
         <p:spPr>
           <a:xfrm>
-            <a:off x="566928" y="4948367"/>
+            <a:off x="566928" y="5131429"/>
             <a:ext cx="11055096" cy="27432"/>
           </a:xfrm>
           <a:prstGeom prst="rect">
@@ -49859,7 +49859,7 @@
         </p:nvSpPr>
         <p:spPr>
           <a:xfrm>
-            <a:off x="566928" y="5250119"/>
+            <a:off x="566928" y="5433181"/>
             <a:ext cx="45720" cy="777240"/>
           </a:xfrm>
           <a:prstGeom prst="rect">
@@ -49903,7 +49903,7 @@
         </p:nvSpPr>
         <p:spPr>
           <a:xfrm>
-            <a:off x="804672" y="5268407"/>
+            <a:off x="804672" y="5451469"/>
             <a:ext cx="10780776" cy="201168"/>
           </a:xfrm>
           <a:prstGeom prst="rect">
@@ -49942,7 +49942,7 @@
         </p:nvSpPr>
         <p:spPr>
           <a:xfrm>
-            <a:off x="804672" y="5506151"/>
+            <a:off x="804672" y="5689213"/>
             <a:ext cx="10780776" cy="502920"/>
           </a:xfrm>
           <a:prstGeom prst="rect">
